--- a/High School Science Q&A Chatbot Day 2.pptx
+++ b/High School Science Q&A Chatbot Day 2.pptx
@@ -5,7 +5,7 @@
     <p:sldMasterId id="2147483648" r:id="rId1"/>
   </p:sldMasterIdLst>
   <p:notesMasterIdLst>
-    <p:notesMasterId r:id="rId14"/>
+    <p:notesMasterId r:id="rId16"/>
   </p:notesMasterIdLst>
   <p:sldIdLst>
     <p:sldId id="295" r:id="rId2"/>
@@ -14,12 +14,14 @@
     <p:sldId id="258" r:id="rId5"/>
     <p:sldId id="304" r:id="rId6"/>
     <p:sldId id="303" r:id="rId7"/>
-    <p:sldId id="305" r:id="rId8"/>
-    <p:sldId id="311" r:id="rId9"/>
-    <p:sldId id="309" r:id="rId10"/>
-    <p:sldId id="307" r:id="rId11"/>
-    <p:sldId id="310" r:id="rId12"/>
-    <p:sldId id="308" r:id="rId13"/>
+    <p:sldId id="313" r:id="rId8"/>
+    <p:sldId id="305" r:id="rId9"/>
+    <p:sldId id="311" r:id="rId10"/>
+    <p:sldId id="309" r:id="rId11"/>
+    <p:sldId id="307" r:id="rId12"/>
+    <p:sldId id="310" r:id="rId13"/>
+    <p:sldId id="308" r:id="rId14"/>
+    <p:sldId id="314" r:id="rId15"/>
   </p:sldIdLst>
   <p:sldSz cx="12192000" cy="6858000"/>
   <p:notesSz cx="6858000" cy="9144000"/>
@@ -1007,36 +1009,6 @@
           <a:bodyPr/>
           <a:lstStyle/>
           <a:p>
-            <a:r>
-              <a:rPr lang="en-US" altLang="ko-KR" dirty="0"/>
-              <a:t>(Please look at the screenshot)</a:t>
-            </a:r>
-          </a:p>
-          <a:p>
-            <a:r>
-              <a:rPr lang="en-US" altLang="ko-KR" dirty="0"/>
-              <a:t>This is what my students see on their phones.</a:t>
-            </a:r>
-          </a:p>
-          <a:p>
-            <a:r>
-              <a:rPr lang="en-US" altLang="ko-KR" dirty="0"/>
-              <a:t>A student asks: 'Why is photosynthesis considered anabolism?'</a:t>
-            </a:r>
-          </a:p>
-          <a:p>
-            <a:r>
-              <a:rPr lang="en-US" altLang="ko-KR" dirty="0"/>
-              <a:t>The AI explains it step-by-step.</a:t>
-            </a:r>
-          </a:p>
-          <a:p>
-            <a:r>
-              <a:rPr lang="en-US" altLang="ko-KR" dirty="0"/>
-              <a:t>Below, you see buttons suggesting other related questions.</a:t>
-            </a:r>
-          </a:p>
-          <a:p>
             <a:endParaRPr lang="ko-KR" altLang="en-US" dirty="0"/>
           </a:p>
         </p:txBody>
@@ -1068,6 +1040,117 @@
     <p:extLst>
       <p:ext uri="{BB962C8B-B14F-4D97-AF65-F5344CB8AC3E}">
         <p14:creationId xmlns:p14="http://schemas.microsoft.com/office/powerpoint/2010/main" val="2877565315"/>
+      </p:ext>
+    </p:extLst>
+  </p:cSld>
+  <p:clrMapOvr>
+    <a:masterClrMapping/>
+  </p:clrMapOvr>
+</p:notes>
+</file>
+
+<file path=ppt/notesSlides/notesSlide6.xml><?xml version="1.0" encoding="utf-8"?>
+<p:notes xmlns:a="http://schemas.openxmlformats.org/drawingml/2006/main" xmlns:r="http://schemas.openxmlformats.org/officeDocument/2006/relationships" xmlns:p="http://schemas.openxmlformats.org/presentationml/2006/main">
+  <p:cSld>
+    <p:spTree>
+      <p:nvGrpSpPr>
+        <p:cNvPr id="1" name=""/>
+        <p:cNvGrpSpPr/>
+        <p:nvPr/>
+      </p:nvGrpSpPr>
+      <p:grpSpPr>
+        <a:xfrm>
+          <a:off x="0" y="0"/>
+          <a:ext cx="0" cy="0"/>
+          <a:chOff x="0" y="0"/>
+          <a:chExt cx="0" cy="0"/>
+        </a:xfrm>
+      </p:grpSpPr>
+      <p:sp>
+        <p:nvSpPr>
+          <p:cNvPr id="2" name="슬라이드 이미지 개체 틀 1"/>
+          <p:cNvSpPr>
+            <a:spLocks noGrp="1" noRot="1" noChangeAspect="1"/>
+          </p:cNvSpPr>
+          <p:nvPr>
+            <p:ph type="sldImg"/>
+          </p:nvPr>
+        </p:nvSpPr>
+        <p:spPr/>
+      </p:sp>
+      <p:sp>
+        <p:nvSpPr>
+          <p:cNvPr id="3" name="슬라이드 노트 개체 틀 2"/>
+          <p:cNvSpPr>
+            <a:spLocks noGrp="1"/>
+          </p:cNvSpPr>
+          <p:nvPr>
+            <p:ph type="body" idx="1"/>
+          </p:nvPr>
+        </p:nvSpPr>
+        <p:spPr/>
+        <p:txBody>
+          <a:bodyPr/>
+          <a:lstStyle/>
+          <a:p>
+            <a:r>
+              <a:rPr lang="en-US" altLang="ko-KR" dirty="0"/>
+              <a:t>(Please look at the screenshot)</a:t>
+            </a:r>
+          </a:p>
+          <a:p>
+            <a:r>
+              <a:rPr lang="en-US" altLang="ko-KR" dirty="0"/>
+              <a:t>This is what my students see on their phones.</a:t>
+            </a:r>
+          </a:p>
+          <a:p>
+            <a:r>
+              <a:rPr lang="en-US" altLang="ko-KR" dirty="0"/>
+              <a:t>A student asks: 'Why is photosynthesis considered anabolism?'</a:t>
+            </a:r>
+          </a:p>
+          <a:p>
+            <a:r>
+              <a:rPr lang="en-US" altLang="ko-KR" dirty="0"/>
+              <a:t>The AI explains it step-by-step.</a:t>
+            </a:r>
+          </a:p>
+          <a:p>
+            <a:r>
+              <a:rPr lang="en-US" altLang="ko-KR" dirty="0"/>
+              <a:t>Below, you see buttons suggesting other related questions.</a:t>
+            </a:r>
+          </a:p>
+        </p:txBody>
+      </p:sp>
+      <p:sp>
+        <p:nvSpPr>
+          <p:cNvPr id="4" name="슬라이드 번호 개체 틀 3"/>
+          <p:cNvSpPr>
+            <a:spLocks noGrp="1"/>
+          </p:cNvSpPr>
+          <p:nvPr>
+            <p:ph type="sldNum" sz="quarter" idx="5"/>
+          </p:nvPr>
+        </p:nvSpPr>
+        <p:spPr/>
+        <p:txBody>
+          <a:bodyPr/>
+          <a:lstStyle/>
+          <a:p>
+            <a:fld id="{4816E038-37BF-984B-B2CC-E10CD9D3625A}" type="slidenum">
+              <a:rPr kumimoji="1" lang="ko-KR" altLang="en-US" smtClean="0"/>
+              <a:t>7</a:t>
+            </a:fld>
+            <a:endParaRPr kumimoji="1" lang="ko-KR" altLang="en-US"/>
+          </a:p>
+        </p:txBody>
+      </p:sp>
+    </p:spTree>
+    <p:extLst>
+      <p:ext uri="{BB962C8B-B14F-4D97-AF65-F5344CB8AC3E}">
+        <p14:creationId xmlns:p14="http://schemas.microsoft.com/office/powerpoint/2010/main" val="4231882308"/>
       </p:ext>
     </p:extLst>
   </p:cSld>
@@ -4435,10 +4518,10 @@
       </p:grpSpPr>
       <p:pic>
         <p:nvPicPr>
-          <p:cNvPr id="3" name="그림 2">
-            <a:extLst>
-              <a:ext uri="{FF2B5EF4-FFF2-40B4-BE49-F238E27FC236}">
-                <a16:creationId xmlns:a16="http://schemas.microsoft.com/office/drawing/2014/main" id="{4C8AA826-350A-F4D9-B1F9-136C78398458}"/>
+          <p:cNvPr id="4" name="그림 3">
+            <a:extLst>
+              <a:ext uri="{FF2B5EF4-FFF2-40B4-BE49-F238E27FC236}">
+                <a16:creationId xmlns:a16="http://schemas.microsoft.com/office/drawing/2014/main" id="{E44974E2-F147-5C2F-AD16-362A5816F231}"/>
               </a:ext>
             </a:extLst>
           </p:cNvPr>
@@ -4455,8 +4538,8 @@
         </p:blipFill>
         <p:spPr>
           <a:xfrm>
-            <a:off x="1351267" y="1227431"/>
-            <a:ext cx="9972986" cy="5124353"/>
+            <a:off x="1652878" y="330681"/>
+            <a:ext cx="8886244" cy="6196638"/>
           </a:xfrm>
           <a:prstGeom prst="rect">
             <a:avLst/>
@@ -4468,7 +4551,7 @@
           <p:cNvPr id="2" name="TextBox 1">
             <a:extLst>
               <a:ext uri="{FF2B5EF4-FFF2-40B4-BE49-F238E27FC236}">
-                <a16:creationId xmlns:a16="http://schemas.microsoft.com/office/drawing/2014/main" id="{4635D94E-C73C-01BA-5ED8-CAB03F08A813}"/>
+                <a16:creationId xmlns:a16="http://schemas.microsoft.com/office/drawing/2014/main" id="{BCF732B5-4C25-FC7C-5E80-8A25402E1B7E}"/>
               </a:ext>
             </a:extLst>
           </p:cNvPr>
@@ -4477,8 +4560,8 @@
         </p:nvSpPr>
         <p:spPr>
           <a:xfrm>
-            <a:off x="1351267" y="244606"/>
-            <a:ext cx="9972986" cy="523220"/>
+            <a:off x="6229350" y="2046268"/>
+            <a:ext cx="6141595" cy="954107"/>
           </a:xfrm>
           <a:prstGeom prst="rect">
             <a:avLst/>
@@ -4493,7 +4576,7 @@
           <a:p>
             <a:r>
               <a:rPr kumimoji="1" lang="en-US" altLang="ko-KR" sz="2800" dirty="0"/>
-              <a:t>4.</a:t>
+              <a:t>3.</a:t>
             </a:r>
             <a:r>
               <a:rPr kumimoji="1" lang="ko-KR" altLang="en-US" sz="2800" dirty="0"/>
@@ -4501,7 +4584,7 @@
             </a:r>
             <a:r>
               <a:rPr kumimoji="1" lang="en-US" altLang="ko-KR" sz="2800" dirty="0"/>
-              <a:t>Copy and paste installation command of </a:t>
+              <a:t>Search for '</a:t>
             </a:r>
             <a:r>
               <a:rPr kumimoji="1" lang="en-US" altLang="ko-KR" sz="2800" dirty="0" err="1"/>
@@ -4509,16 +4592,60 @@
             </a:r>
             <a:r>
               <a:rPr kumimoji="1" lang="en-US" altLang="ko-KR" sz="2800" dirty="0"/>
-              <a:t> for Windows.</a:t>
+              <a:t> astral' on Google and go to the installation page.</a:t>
             </a:r>
             <a:endParaRPr kumimoji="1" lang="ko-KR" altLang="en-US" sz="2800" dirty="0"/>
           </a:p>
         </p:txBody>
       </p:sp>
+      <p:cxnSp>
+        <p:nvCxnSpPr>
+          <p:cNvPr id="3" name="직선 화살표 연결선 2">
+            <a:extLst>
+              <a:ext uri="{FF2B5EF4-FFF2-40B4-BE49-F238E27FC236}">
+                <a16:creationId xmlns:a16="http://schemas.microsoft.com/office/drawing/2014/main" id="{9C62EF1F-0DCD-512D-E371-B280504DEE7A}"/>
+              </a:ext>
+            </a:extLst>
+          </p:cNvPr>
+          <p:cNvCxnSpPr>
+            <a:cxnSpLocks/>
+          </p:cNvCxnSpPr>
+          <p:nvPr/>
+        </p:nvCxnSpPr>
+        <p:spPr>
+          <a:xfrm flipH="1">
+            <a:off x="3358753" y="2886075"/>
+            <a:ext cx="2870597" cy="1657350"/>
+          </a:xfrm>
+          <a:prstGeom prst="straightConnector1">
+            <a:avLst/>
+          </a:prstGeom>
+          <a:ln w="76200">
+            <a:solidFill>
+              <a:srgbClr val="FF0000"/>
+            </a:solidFill>
+            <a:tailEnd type="triangle"/>
+          </a:ln>
+        </p:spPr>
+        <p:style>
+          <a:lnRef idx="2">
+            <a:schemeClr val="accent1"/>
+          </a:lnRef>
+          <a:fillRef idx="0">
+            <a:schemeClr val="accent1"/>
+          </a:fillRef>
+          <a:effectRef idx="1">
+            <a:schemeClr val="accent1"/>
+          </a:effectRef>
+          <a:fontRef idx="minor">
+            <a:schemeClr val="tx1"/>
+          </a:fontRef>
+        </p:style>
+      </p:cxnSp>
     </p:spTree>
     <p:extLst>
       <p:ext uri="{BB962C8B-B14F-4D97-AF65-F5344CB8AC3E}">
-        <p14:creationId xmlns:p14="http://schemas.microsoft.com/office/powerpoint/2010/main" val="2949977002"/>
+        <p14:creationId xmlns:p14="http://schemas.microsoft.com/office/powerpoint/2010/main" val="2014606205"/>
       </p:ext>
     </p:extLst>
   </p:cSld>
@@ -4547,10 +4674,10 @@
       </p:grpSpPr>
       <p:pic>
         <p:nvPicPr>
-          <p:cNvPr id="2" name="그림 1">
-            <a:extLst>
-              <a:ext uri="{FF2B5EF4-FFF2-40B4-BE49-F238E27FC236}">
-                <a16:creationId xmlns:a16="http://schemas.microsoft.com/office/drawing/2014/main" id="{EC721B3C-995B-33D9-03D5-76883661DDF8}"/>
+          <p:cNvPr id="3" name="그림 2">
+            <a:extLst>
+              <a:ext uri="{FF2B5EF4-FFF2-40B4-BE49-F238E27FC236}">
+                <a16:creationId xmlns:a16="http://schemas.microsoft.com/office/drawing/2014/main" id="{4C8AA826-350A-F4D9-B1F9-136C78398458}"/>
               </a:ext>
             </a:extLst>
           </p:cNvPr>
@@ -4561,15 +4688,14 @@
         </p:nvPicPr>
         <p:blipFill>
           <a:blip r:embed="rId2"/>
-          <a:srcRect t="5598" b="11373"/>
           <a:stretch>
             <a:fillRect/>
           </a:stretch>
         </p:blipFill>
         <p:spPr>
           <a:xfrm>
-            <a:off x="1048286" y="1126901"/>
-            <a:ext cx="10095428" cy="5731099"/>
+            <a:off x="1351267" y="1227431"/>
+            <a:ext cx="9972986" cy="5124353"/>
           </a:xfrm>
           <a:prstGeom prst="rect">
             <a:avLst/>
@@ -4578,10 +4704,10 @@
       </p:pic>
       <p:sp>
         <p:nvSpPr>
-          <p:cNvPr id="3" name="TextBox 2">
-            <a:extLst>
-              <a:ext uri="{FF2B5EF4-FFF2-40B4-BE49-F238E27FC236}">
-                <a16:creationId xmlns:a16="http://schemas.microsoft.com/office/drawing/2014/main" id="{425D2A5F-A773-95BD-F505-F5273A8CA1B4}"/>
+          <p:cNvPr id="2" name="TextBox 1">
+            <a:extLst>
+              <a:ext uri="{FF2B5EF4-FFF2-40B4-BE49-F238E27FC236}">
+                <a16:creationId xmlns:a16="http://schemas.microsoft.com/office/drawing/2014/main" id="{4635D94E-C73C-01BA-5ED8-CAB03F08A813}"/>
               </a:ext>
             </a:extLst>
           </p:cNvPr>
@@ -4590,8 +4716,8 @@
         </p:nvSpPr>
         <p:spPr>
           <a:xfrm>
-            <a:off x="1357313" y="360609"/>
-            <a:ext cx="9580339" cy="523220"/>
+            <a:off x="1351267" y="244606"/>
+            <a:ext cx="9972986" cy="523220"/>
           </a:xfrm>
           <a:prstGeom prst="rect">
             <a:avLst/>
@@ -4606,7 +4732,15 @@
           <a:p>
             <a:r>
               <a:rPr kumimoji="1" lang="en-US" altLang="ko-KR" sz="2800" dirty="0"/>
-              <a:t>4. Copy and paste installation command of </a:t>
+              <a:t>4.</a:t>
+            </a:r>
+            <a:r>
+              <a:rPr kumimoji="1" lang="ko-KR" altLang="en-US" sz="2800" dirty="0"/>
+              <a:t> </a:t>
+            </a:r>
+            <a:r>
+              <a:rPr kumimoji="1" lang="en-US" altLang="ko-KR" sz="2800" dirty="0"/>
+              <a:t>Copy and paste installation command of </a:t>
             </a:r>
             <a:r>
               <a:rPr kumimoji="1" lang="en-US" altLang="ko-KR" sz="2800" dirty="0" err="1"/>
@@ -4614,7 +4748,7 @@
             </a:r>
             <a:r>
               <a:rPr kumimoji="1" lang="en-US" altLang="ko-KR" sz="2800" dirty="0"/>
-              <a:t> for MacOS.</a:t>
+              <a:t> for Windows.</a:t>
             </a:r>
             <a:endParaRPr kumimoji="1" lang="ko-KR" altLang="en-US" sz="2800" dirty="0"/>
           </a:p>
@@ -4623,7 +4757,7 @@
     </p:spTree>
     <p:extLst>
       <p:ext uri="{BB962C8B-B14F-4D97-AF65-F5344CB8AC3E}">
-        <p14:creationId xmlns:p14="http://schemas.microsoft.com/office/powerpoint/2010/main" val="553374580"/>
+        <p14:creationId xmlns:p14="http://schemas.microsoft.com/office/powerpoint/2010/main" val="2949977002"/>
       </p:ext>
     </p:extLst>
   </p:cSld>
@@ -4650,6 +4784,111 @@
           <a:chExt cx="0" cy="0"/>
         </a:xfrm>
       </p:grpSpPr>
+      <p:pic>
+        <p:nvPicPr>
+          <p:cNvPr id="2" name="그림 1">
+            <a:extLst>
+              <a:ext uri="{FF2B5EF4-FFF2-40B4-BE49-F238E27FC236}">
+                <a16:creationId xmlns:a16="http://schemas.microsoft.com/office/drawing/2014/main" id="{EC721B3C-995B-33D9-03D5-76883661DDF8}"/>
+              </a:ext>
+            </a:extLst>
+          </p:cNvPr>
+          <p:cNvPicPr>
+            <a:picLocks noChangeAspect="1"/>
+          </p:cNvPicPr>
+          <p:nvPr/>
+        </p:nvPicPr>
+        <p:blipFill>
+          <a:blip r:embed="rId2"/>
+          <a:srcRect t="5598" b="11373"/>
+          <a:stretch>
+            <a:fillRect/>
+          </a:stretch>
+        </p:blipFill>
+        <p:spPr>
+          <a:xfrm>
+            <a:off x="1048286" y="1126901"/>
+            <a:ext cx="10095428" cy="5731099"/>
+          </a:xfrm>
+          <a:prstGeom prst="rect">
+            <a:avLst/>
+          </a:prstGeom>
+        </p:spPr>
+      </p:pic>
+      <p:sp>
+        <p:nvSpPr>
+          <p:cNvPr id="3" name="TextBox 2">
+            <a:extLst>
+              <a:ext uri="{FF2B5EF4-FFF2-40B4-BE49-F238E27FC236}">
+                <a16:creationId xmlns:a16="http://schemas.microsoft.com/office/drawing/2014/main" id="{425D2A5F-A773-95BD-F505-F5273A8CA1B4}"/>
+              </a:ext>
+            </a:extLst>
+          </p:cNvPr>
+          <p:cNvSpPr txBox="1"/>
+          <p:nvPr/>
+        </p:nvSpPr>
+        <p:spPr>
+          <a:xfrm>
+            <a:off x="1357313" y="360609"/>
+            <a:ext cx="9580339" cy="523220"/>
+          </a:xfrm>
+          <a:prstGeom prst="rect">
+            <a:avLst/>
+          </a:prstGeom>
+          <a:noFill/>
+        </p:spPr>
+        <p:txBody>
+          <a:bodyPr wrap="square" rtlCol="0">
+            <a:spAutoFit/>
+          </a:bodyPr>
+          <a:lstStyle/>
+          <a:p>
+            <a:r>
+              <a:rPr kumimoji="1" lang="en-US" altLang="ko-KR" sz="2800" dirty="0"/>
+              <a:t>4. Copy and paste installation command of </a:t>
+            </a:r>
+            <a:r>
+              <a:rPr kumimoji="1" lang="en-US" altLang="ko-KR" sz="2800" dirty="0" err="1"/>
+              <a:t>uv</a:t>
+            </a:r>
+            <a:r>
+              <a:rPr kumimoji="1" lang="en-US" altLang="ko-KR" sz="2800" dirty="0"/>
+              <a:t> for MacOS.</a:t>
+            </a:r>
+            <a:endParaRPr kumimoji="1" lang="ko-KR" altLang="en-US" sz="2800" dirty="0"/>
+          </a:p>
+        </p:txBody>
+      </p:sp>
+    </p:spTree>
+    <p:extLst>
+      <p:ext uri="{BB962C8B-B14F-4D97-AF65-F5344CB8AC3E}">
+        <p14:creationId xmlns:p14="http://schemas.microsoft.com/office/powerpoint/2010/main" val="553374580"/>
+      </p:ext>
+    </p:extLst>
+  </p:cSld>
+  <p:clrMapOvr>
+    <a:masterClrMapping/>
+  </p:clrMapOvr>
+</p:sld>
+</file>
+
+<file path=ppt/slides/slide13.xml><?xml version="1.0" encoding="utf-8"?>
+<p:sld xmlns:a="http://schemas.openxmlformats.org/drawingml/2006/main" xmlns:r="http://schemas.openxmlformats.org/officeDocument/2006/relationships" xmlns:p="http://schemas.openxmlformats.org/presentationml/2006/main">
+  <p:cSld>
+    <p:spTree>
+      <p:nvGrpSpPr>
+        <p:cNvPr id="1" name=""/>
+        <p:cNvGrpSpPr/>
+        <p:nvPr/>
+      </p:nvGrpSpPr>
+      <p:grpSpPr>
+        <a:xfrm>
+          <a:off x="0" y="0"/>
+          <a:ext cx="0" cy="0"/>
+          <a:chOff x="0" y="0"/>
+          <a:chExt cx="0" cy="0"/>
+        </a:xfrm>
+      </p:grpSpPr>
       <p:sp>
         <p:nvSpPr>
           <p:cNvPr id="2" name="제목 1">
@@ -4695,9 +4934,16 @@
             <p:ph idx="1"/>
           </p:nvPr>
         </p:nvSpPr>
-        <p:spPr/>
-        <p:txBody>
-          <a:bodyPr/>
+        <p:spPr>
+          <a:xfrm>
+            <a:off x="838199" y="1825624"/>
+            <a:ext cx="11184467" cy="5032375"/>
+          </a:xfrm>
+        </p:spPr>
+        <p:txBody>
+          <a:bodyPr>
+            <a:normAutofit lnSpcReduction="10000"/>
+          </a:bodyPr>
           <a:lstStyle/>
           <a:p>
             <a:r>
@@ -4712,6 +4958,15 @@
             <a:r>
               <a:rPr lang="en-US" altLang="ko-KR" dirty="0"/>
               <a:t>After you watch my procedure, you can do it anytime you want.</a:t>
+            </a:r>
+          </a:p>
+          <a:p>
+            <a:endParaRPr lang="en-US" altLang="ko-KR" dirty="0"/>
+          </a:p>
+          <a:p>
+            <a:r>
+              <a:rPr lang="en-US" altLang="ko-KR" dirty="0"/>
+              <a:t>With the upgrades to the Bulgarian Sentence-BERT model and the open-source LLM for our vector store, the chatbot's performance will improve.</a:t>
             </a:r>
           </a:p>
           <a:p>
@@ -4744,6 +4999,119 @@
     <p:extLst>
       <p:ext uri="{BB962C8B-B14F-4D97-AF65-F5344CB8AC3E}">
         <p14:creationId xmlns:p14="http://schemas.microsoft.com/office/powerpoint/2010/main" val="1316816927"/>
+      </p:ext>
+    </p:extLst>
+  </p:cSld>
+  <p:clrMapOvr>
+    <a:masterClrMapping/>
+  </p:clrMapOvr>
+</p:sld>
+</file>
+
+<file path=ppt/slides/slide14.xml><?xml version="1.0" encoding="utf-8"?>
+<p:sld xmlns:a="http://schemas.openxmlformats.org/drawingml/2006/main" xmlns:r="http://schemas.openxmlformats.org/officeDocument/2006/relationships" xmlns:p="http://schemas.openxmlformats.org/presentationml/2006/main">
+  <p:cSld>
+    <p:spTree>
+      <p:nvGrpSpPr>
+        <p:cNvPr id="1" name=""/>
+        <p:cNvGrpSpPr/>
+        <p:nvPr/>
+      </p:nvGrpSpPr>
+      <p:grpSpPr>
+        <a:xfrm>
+          <a:off x="0" y="0"/>
+          <a:ext cx="0" cy="0"/>
+          <a:chOff x="0" y="0"/>
+          <a:chExt cx="0" cy="0"/>
+        </a:xfrm>
+      </p:grpSpPr>
+      <p:sp>
+        <p:nvSpPr>
+          <p:cNvPr id="2" name="제목 1">
+            <a:extLst>
+              <a:ext uri="{FF2B5EF4-FFF2-40B4-BE49-F238E27FC236}">
+                <a16:creationId xmlns:a16="http://schemas.microsoft.com/office/drawing/2014/main" id="{C2A33931-8109-0FB8-CFD6-107457863A5F}"/>
+              </a:ext>
+            </a:extLst>
+          </p:cNvPr>
+          <p:cNvSpPr>
+            <a:spLocks noGrp="1"/>
+          </p:cNvSpPr>
+          <p:nvPr>
+            <p:ph type="title"/>
+          </p:nvPr>
+        </p:nvSpPr>
+        <p:spPr/>
+        <p:txBody>
+          <a:bodyPr/>
+          <a:lstStyle/>
+          <a:p>
+            <a:r>
+              <a:rPr kumimoji="1" lang="en-US" altLang="ko-KR" dirty="0"/>
+              <a:t>References</a:t>
+            </a:r>
+            <a:endParaRPr kumimoji="1" lang="ko-KR" altLang="en-US" dirty="0"/>
+          </a:p>
+        </p:txBody>
+      </p:sp>
+      <p:sp>
+        <p:nvSpPr>
+          <p:cNvPr id="3" name="내용 개체 틀 2">
+            <a:extLst>
+              <a:ext uri="{FF2B5EF4-FFF2-40B4-BE49-F238E27FC236}">
+                <a16:creationId xmlns:a16="http://schemas.microsoft.com/office/drawing/2014/main" id="{2A9E1874-4822-97E1-F8F4-C9B93DEF23B4}"/>
+              </a:ext>
+            </a:extLst>
+          </p:cNvPr>
+          <p:cNvSpPr>
+            <a:spLocks noGrp="1"/>
+          </p:cNvSpPr>
+          <p:nvPr>
+            <p:ph idx="1"/>
+          </p:nvPr>
+        </p:nvSpPr>
+        <p:spPr/>
+        <p:txBody>
+          <a:bodyPr/>
+          <a:lstStyle/>
+          <a:p>
+            <a:r>
+              <a:rPr kumimoji="1" lang="en-US" altLang="ko-KR" dirty="0"/>
+              <a:t>Bulgarian Sentence-BERT model: </a:t>
+            </a:r>
+            <a:r>
+              <a:rPr kumimoji="1" lang="en-US" altLang="ko-KR" dirty="0">
+                <a:hlinkClick r:id="rId2"/>
+              </a:rPr>
+              <a:t>https://huggingface.co/usmiva/bert-web-bg</a:t>
+            </a:r>
+            <a:endParaRPr kumimoji="1" lang="en-US" altLang="ko-KR" dirty="0"/>
+          </a:p>
+          <a:p>
+            <a:endParaRPr kumimoji="1" lang="en-US" altLang="ko-KR" dirty="0"/>
+          </a:p>
+          <a:p>
+            <a:r>
+              <a:rPr kumimoji="1" lang="en-US" altLang="ko-KR" dirty="0"/>
+              <a:t>Science Q&amp;A chatbot template: </a:t>
+            </a:r>
+            <a:r>
+              <a:rPr kumimoji="1" lang="en-US" altLang="ko-KR" dirty="0">
+                <a:hlinkClick r:id="rId3"/>
+              </a:rPr>
+              <a:t>https://github.com/kungmo/science_qna_rag_irqa_chatbot</a:t>
+            </a:r>
+            <a:endParaRPr kumimoji="1" lang="en-US" altLang="ko-KR" dirty="0"/>
+          </a:p>
+          <a:p>
+            <a:endParaRPr kumimoji="1" lang="ko-KR" altLang="en-US" dirty="0"/>
+          </a:p>
+        </p:txBody>
+      </p:sp>
+    </p:spTree>
+    <p:extLst>
+      <p:ext uri="{BB962C8B-B14F-4D97-AF65-F5344CB8AC3E}">
+        <p14:creationId xmlns:p14="http://schemas.microsoft.com/office/powerpoint/2010/main" val="967303324"/>
       </p:ext>
     </p:extLst>
   </p:cSld>
@@ -4893,13 +5261,6 @@
               <a:rPr lang="en-US" altLang="ko-KR" dirty="0"/>
               <a:t>We need an AI that acts as a 'Guide', not a 'Problem Solver'.</a:t>
             </a:r>
-          </a:p>
-          <a:p>
-            <a:endParaRPr lang="en-US" altLang="ko-KR" dirty="0"/>
-          </a:p>
-          <a:p>
-            <a:pPr lvl="1"/>
-            <a:endParaRPr lang="ko-KR" altLang="en-US" dirty="0"/>
           </a:p>
         </p:txBody>
       </p:sp>
@@ -5438,7 +5799,7 @@
           </a:p>
           <a:p>
             <a:r>
-              <a:rPr lang="en-US" altLang="ko-KR" dirty="0">
+              <a:rPr lang="en-US" altLang="ko-KR" sz="4000" dirty="0">
                 <a:hlinkClick r:id="rId3"/>
               </a:rPr>
               <a:t>https://acer2.snu.ac.kr:8503</a:t>
@@ -5535,6 +5896,171 @@
           <a:chExt cx="0" cy="0"/>
         </a:xfrm>
       </p:grpSpPr>
+      <p:pic>
+        <p:nvPicPr>
+          <p:cNvPr id="4" name="그림 3">
+            <a:extLst>
+              <a:ext uri="{FF2B5EF4-FFF2-40B4-BE49-F238E27FC236}">
+                <a16:creationId xmlns:a16="http://schemas.microsoft.com/office/drawing/2014/main" id="{4913C1DB-4A6D-3F6A-DF5D-C35F03352335}"/>
+              </a:ext>
+            </a:extLst>
+          </p:cNvPr>
+          <p:cNvPicPr>
+            <a:picLocks noChangeAspect="1"/>
+          </p:cNvPicPr>
+          <p:nvPr/>
+        </p:nvPicPr>
+        <p:blipFill>
+          <a:blip r:embed="rId3"/>
+          <a:stretch>
+            <a:fillRect/>
+          </a:stretch>
+        </p:blipFill>
+        <p:spPr>
+          <a:xfrm>
+            <a:off x="985855" y="0"/>
+            <a:ext cx="10220289" cy="6858000"/>
+          </a:xfrm>
+          <a:prstGeom prst="rect">
+            <a:avLst/>
+          </a:prstGeom>
+        </p:spPr>
+      </p:pic>
+      <p:pic>
+        <p:nvPicPr>
+          <p:cNvPr id="5" name="그림 4">
+            <a:extLst>
+              <a:ext uri="{FF2B5EF4-FFF2-40B4-BE49-F238E27FC236}">
+                <a16:creationId xmlns:a16="http://schemas.microsoft.com/office/drawing/2014/main" id="{A2366461-04F0-A303-405D-F81A450FC023}"/>
+              </a:ext>
+            </a:extLst>
+          </p:cNvPr>
+          <p:cNvPicPr>
+            <a:picLocks noChangeAspect="1"/>
+          </p:cNvPicPr>
+          <p:nvPr/>
+        </p:nvPicPr>
+        <p:blipFill>
+          <a:blip r:embed="rId4"/>
+          <a:stretch>
+            <a:fillRect/>
+          </a:stretch>
+        </p:blipFill>
+        <p:spPr>
+          <a:xfrm>
+            <a:off x="2058737" y="1"/>
+            <a:ext cx="10133263" cy="6857999"/>
+          </a:xfrm>
+          <a:prstGeom prst="rect">
+            <a:avLst/>
+          </a:prstGeom>
+        </p:spPr>
+      </p:pic>
+    </p:spTree>
+    <p:extLst>
+      <p:ext uri="{BB962C8B-B14F-4D97-AF65-F5344CB8AC3E}">
+        <p14:creationId xmlns:p14="http://schemas.microsoft.com/office/powerpoint/2010/main" val="2934442579"/>
+      </p:ext>
+    </p:extLst>
+  </p:cSld>
+  <p:clrMapOvr>
+    <a:masterClrMapping/>
+  </p:clrMapOvr>
+  <p:timing>
+    <p:tnLst>
+      <p:par>
+        <p:cTn id="1" dur="indefinite" restart="never" nodeType="tmRoot">
+          <p:childTnLst>
+            <p:seq concurrent="1" nextAc="seek">
+              <p:cTn id="2" dur="indefinite" nodeType="mainSeq">
+                <p:childTnLst>
+                  <p:par>
+                    <p:cTn id="3" fill="hold">
+                      <p:stCondLst>
+                        <p:cond delay="indefinite"/>
+                      </p:stCondLst>
+                      <p:childTnLst>
+                        <p:par>
+                          <p:cTn id="4" fill="hold">
+                            <p:stCondLst>
+                              <p:cond delay="0"/>
+                            </p:stCondLst>
+                            <p:childTnLst>
+                              <p:par>
+                                <p:cTn id="5" presetID="1" presetClass="entr" presetSubtype="0" fill="hold" nodeType="clickEffect">
+                                  <p:stCondLst>
+                                    <p:cond delay="0"/>
+                                  </p:stCondLst>
+                                  <p:childTnLst>
+                                    <p:set>
+                                      <p:cBhvr>
+                                        <p:cTn id="6" dur="1" fill="hold">
+                                          <p:stCondLst>
+                                            <p:cond delay="0"/>
+                                          </p:stCondLst>
+                                        </p:cTn>
+                                        <p:tgtEl>
+                                          <p:spTgt spid="5"/>
+                                        </p:tgtEl>
+                                        <p:attrNameLst>
+                                          <p:attrName>style.visibility</p:attrName>
+                                        </p:attrNameLst>
+                                      </p:cBhvr>
+                                      <p:to>
+                                        <p:strVal val="visible"/>
+                                      </p:to>
+                                    </p:set>
+                                  </p:childTnLst>
+                                </p:cTn>
+                              </p:par>
+                            </p:childTnLst>
+                          </p:cTn>
+                        </p:par>
+                      </p:childTnLst>
+                    </p:cTn>
+                  </p:par>
+                </p:childTnLst>
+              </p:cTn>
+              <p:prevCondLst>
+                <p:cond evt="onPrev" delay="0">
+                  <p:tgtEl>
+                    <p:sldTgt/>
+                  </p:tgtEl>
+                </p:cond>
+              </p:prevCondLst>
+              <p:nextCondLst>
+                <p:cond evt="onNext" delay="0">
+                  <p:tgtEl>
+                    <p:sldTgt/>
+                  </p:tgtEl>
+                </p:cond>
+              </p:nextCondLst>
+            </p:seq>
+          </p:childTnLst>
+        </p:cTn>
+      </p:par>
+    </p:tnLst>
+  </p:timing>
+</p:sld>
+</file>
+
+<file path=ppt/slides/slide8.xml><?xml version="1.0" encoding="utf-8"?>
+<p:sld xmlns:a="http://schemas.openxmlformats.org/drawingml/2006/main" xmlns:r="http://schemas.openxmlformats.org/officeDocument/2006/relationships" xmlns:p="http://schemas.openxmlformats.org/presentationml/2006/main">
+  <p:cSld>
+    <p:spTree>
+      <p:nvGrpSpPr>
+        <p:cNvPr id="1" name=""/>
+        <p:cNvGrpSpPr/>
+        <p:nvPr/>
+      </p:nvGrpSpPr>
+      <p:grpSpPr>
+        <a:xfrm>
+          <a:off x="0" y="0"/>
+          <a:ext cx="0" cy="0"/>
+          <a:chOff x="0" y="0"/>
+          <a:chExt cx="0" cy="0"/>
+        </a:xfrm>
+      </p:grpSpPr>
       <p:sp>
         <p:nvSpPr>
           <p:cNvPr id="2" name="제목 1">
@@ -5844,7 +6370,7 @@
 </p:sld>
 </file>
 
-<file path=ppt/slides/slide8.xml><?xml version="1.0" encoding="utf-8"?>
+<file path=ppt/slides/slide9.xml><?xml version="1.0" encoding="utf-8"?>
 <p:sld xmlns:a="http://schemas.openxmlformats.org/drawingml/2006/main" xmlns:r="http://schemas.openxmlformats.org/officeDocument/2006/relationships" xmlns:p="http://schemas.openxmlformats.org/presentationml/2006/main">
   <p:cSld>
     <p:spTree>
@@ -6137,162 +6663,6 @@
     <p:extLst>
       <p:ext uri="{BB962C8B-B14F-4D97-AF65-F5344CB8AC3E}">
         <p14:creationId xmlns:p14="http://schemas.microsoft.com/office/powerpoint/2010/main" val="550117190"/>
-      </p:ext>
-    </p:extLst>
-  </p:cSld>
-  <p:clrMapOvr>
-    <a:masterClrMapping/>
-  </p:clrMapOvr>
-</p:sld>
-</file>
-
-<file path=ppt/slides/slide9.xml><?xml version="1.0" encoding="utf-8"?>
-<p:sld xmlns:a="http://schemas.openxmlformats.org/drawingml/2006/main" xmlns:r="http://schemas.openxmlformats.org/officeDocument/2006/relationships" xmlns:p="http://schemas.openxmlformats.org/presentationml/2006/main">
-  <p:cSld>
-    <p:spTree>
-      <p:nvGrpSpPr>
-        <p:cNvPr id="1" name=""/>
-        <p:cNvGrpSpPr/>
-        <p:nvPr/>
-      </p:nvGrpSpPr>
-      <p:grpSpPr>
-        <a:xfrm>
-          <a:off x="0" y="0"/>
-          <a:ext cx="0" cy="0"/>
-          <a:chOff x="0" y="0"/>
-          <a:chExt cx="0" cy="0"/>
-        </a:xfrm>
-      </p:grpSpPr>
-      <p:pic>
-        <p:nvPicPr>
-          <p:cNvPr id="4" name="그림 3">
-            <a:extLst>
-              <a:ext uri="{FF2B5EF4-FFF2-40B4-BE49-F238E27FC236}">
-                <a16:creationId xmlns:a16="http://schemas.microsoft.com/office/drawing/2014/main" id="{E44974E2-F147-5C2F-AD16-362A5816F231}"/>
-              </a:ext>
-            </a:extLst>
-          </p:cNvPr>
-          <p:cNvPicPr>
-            <a:picLocks noChangeAspect="1"/>
-          </p:cNvPicPr>
-          <p:nvPr/>
-        </p:nvPicPr>
-        <p:blipFill>
-          <a:blip r:embed="rId2"/>
-          <a:stretch>
-            <a:fillRect/>
-          </a:stretch>
-        </p:blipFill>
-        <p:spPr>
-          <a:xfrm>
-            <a:off x="1652878" y="330681"/>
-            <a:ext cx="8886244" cy="6196638"/>
-          </a:xfrm>
-          <a:prstGeom prst="rect">
-            <a:avLst/>
-          </a:prstGeom>
-        </p:spPr>
-      </p:pic>
-      <p:sp>
-        <p:nvSpPr>
-          <p:cNvPr id="2" name="TextBox 1">
-            <a:extLst>
-              <a:ext uri="{FF2B5EF4-FFF2-40B4-BE49-F238E27FC236}">
-                <a16:creationId xmlns:a16="http://schemas.microsoft.com/office/drawing/2014/main" id="{BCF732B5-4C25-FC7C-5E80-8A25402E1B7E}"/>
-              </a:ext>
-            </a:extLst>
-          </p:cNvPr>
-          <p:cNvSpPr txBox="1"/>
-          <p:nvPr/>
-        </p:nvSpPr>
-        <p:spPr>
-          <a:xfrm>
-            <a:off x="6229350" y="2046268"/>
-            <a:ext cx="6141595" cy="954107"/>
-          </a:xfrm>
-          <a:prstGeom prst="rect">
-            <a:avLst/>
-          </a:prstGeom>
-          <a:noFill/>
-        </p:spPr>
-        <p:txBody>
-          <a:bodyPr wrap="square" rtlCol="0">
-            <a:spAutoFit/>
-          </a:bodyPr>
-          <a:lstStyle/>
-          <a:p>
-            <a:r>
-              <a:rPr kumimoji="1" lang="en-US" altLang="ko-KR" sz="2800" dirty="0"/>
-              <a:t>3.</a:t>
-            </a:r>
-            <a:r>
-              <a:rPr kumimoji="1" lang="ko-KR" altLang="en-US" sz="2800" dirty="0"/>
-              <a:t> </a:t>
-            </a:r>
-            <a:r>
-              <a:rPr kumimoji="1" lang="en-US" altLang="ko-KR" sz="2800" dirty="0"/>
-              <a:t>Search for '</a:t>
-            </a:r>
-            <a:r>
-              <a:rPr kumimoji="1" lang="en-US" altLang="ko-KR" sz="2800" dirty="0" err="1"/>
-              <a:t>uv</a:t>
-            </a:r>
-            <a:r>
-              <a:rPr kumimoji="1" lang="en-US" altLang="ko-KR" sz="2800" dirty="0"/>
-              <a:t> astral' on Google and go to the installation page.</a:t>
-            </a:r>
-            <a:endParaRPr kumimoji="1" lang="ko-KR" altLang="en-US" sz="2800" dirty="0"/>
-          </a:p>
-        </p:txBody>
-      </p:sp>
-      <p:cxnSp>
-        <p:nvCxnSpPr>
-          <p:cNvPr id="3" name="직선 화살표 연결선 2">
-            <a:extLst>
-              <a:ext uri="{FF2B5EF4-FFF2-40B4-BE49-F238E27FC236}">
-                <a16:creationId xmlns:a16="http://schemas.microsoft.com/office/drawing/2014/main" id="{9C62EF1F-0DCD-512D-E371-B280504DEE7A}"/>
-              </a:ext>
-            </a:extLst>
-          </p:cNvPr>
-          <p:cNvCxnSpPr>
-            <a:cxnSpLocks/>
-          </p:cNvCxnSpPr>
-          <p:nvPr/>
-        </p:nvCxnSpPr>
-        <p:spPr>
-          <a:xfrm flipH="1">
-            <a:off x="3358753" y="2886075"/>
-            <a:ext cx="2870597" cy="1657350"/>
-          </a:xfrm>
-          <a:prstGeom prst="straightConnector1">
-            <a:avLst/>
-          </a:prstGeom>
-          <a:ln w="76200">
-            <a:solidFill>
-              <a:srgbClr val="FF0000"/>
-            </a:solidFill>
-            <a:tailEnd type="triangle"/>
-          </a:ln>
-        </p:spPr>
-        <p:style>
-          <a:lnRef idx="2">
-            <a:schemeClr val="accent1"/>
-          </a:lnRef>
-          <a:fillRef idx="0">
-            <a:schemeClr val="accent1"/>
-          </a:fillRef>
-          <a:effectRef idx="1">
-            <a:schemeClr val="accent1"/>
-          </a:effectRef>
-          <a:fontRef idx="minor">
-            <a:schemeClr val="tx1"/>
-          </a:fontRef>
-        </p:style>
-      </p:cxnSp>
-    </p:spTree>
-    <p:extLst>
-      <p:ext uri="{BB962C8B-B14F-4D97-AF65-F5344CB8AC3E}">
-        <p14:creationId xmlns:p14="http://schemas.microsoft.com/office/powerpoint/2010/main" val="2014606205"/>
       </p:ext>
     </p:extLst>
   </p:cSld>
